--- a/doc/场景音乐推荐.pptx
+++ b/doc/场景音乐推荐.pptx
@@ -1276,6 +1276,13 @@
             <a:srgbClr val="93FF73"/>
           </a:solidFill>
         </p:spPr>
+        <p:txBody>
+          <a:bodyPr/>
+          <a:lstStyle/>
+          <a:p>
+            <a:endParaRPr lang="zh-CN" altLang="en-US"/>
+          </a:p>
+        </p:txBody>
       </p:sp>
       <p:pic>
         <p:nvPicPr>
@@ -1394,6 +1401,13 @@
             <a:srgbClr val="FCEC73"/>
           </a:solidFill>
         </p:spPr>
+        <p:txBody>
+          <a:bodyPr/>
+          <a:lstStyle/>
+          <a:p>
+            <a:endParaRPr lang="zh-CN" altLang="en-US"/>
+          </a:p>
+        </p:txBody>
       </p:sp>
       <p:sp>
         <p:nvSpPr>
@@ -1413,6 +1427,13 @@
             <a:srgbClr val="0D0D0D"/>
           </a:solidFill>
         </p:spPr>
+        <p:txBody>
+          <a:bodyPr/>
+          <a:lstStyle/>
+          <a:p>
+            <a:endParaRPr lang="zh-CN" altLang="en-US"/>
+          </a:p>
+        </p:txBody>
       </p:sp>
       <p:sp>
         <p:nvSpPr>
@@ -1432,6 +1453,13 @@
             <a:srgbClr val="7030A0"/>
           </a:solidFill>
         </p:spPr>
+        <p:txBody>
+          <a:bodyPr/>
+          <a:lstStyle/>
+          <a:p>
+            <a:endParaRPr lang="zh-CN" altLang="en-US"/>
+          </a:p>
+        </p:txBody>
       </p:sp>
       <p:sp>
         <p:nvSpPr>
@@ -1451,6 +1479,13 @@
             <a:srgbClr val="7030A0"/>
           </a:solidFill>
         </p:spPr>
+        <p:txBody>
+          <a:bodyPr/>
+          <a:lstStyle/>
+          <a:p>
+            <a:endParaRPr lang="zh-CN" altLang="en-US"/>
+          </a:p>
+        </p:txBody>
       </p:sp>
       <p:sp>
         <p:nvSpPr>
@@ -1470,6 +1505,13 @@
             <a:srgbClr val="7030A0"/>
           </a:solidFill>
         </p:spPr>
+        <p:txBody>
+          <a:bodyPr/>
+          <a:lstStyle/>
+          <a:p>
+            <a:endParaRPr lang="zh-CN" altLang="en-US"/>
+          </a:p>
+        </p:txBody>
       </p:sp>
       <p:sp>
         <p:nvSpPr>
@@ -1489,6 +1531,13 @@
             <a:srgbClr val="0D0D0D"/>
           </a:solidFill>
         </p:spPr>
+        <p:txBody>
+          <a:bodyPr/>
+          <a:lstStyle/>
+          <a:p>
+            <a:endParaRPr lang="zh-CN" altLang="en-US"/>
+          </a:p>
+        </p:txBody>
       </p:sp>
       <p:sp>
         <p:nvSpPr>
@@ -1508,6 +1557,13 @@
             <a:srgbClr val="0D0D0D"/>
           </a:solidFill>
         </p:spPr>
+        <p:txBody>
+          <a:bodyPr/>
+          <a:lstStyle/>
+          <a:p>
+            <a:endParaRPr lang="zh-CN" altLang="en-US"/>
+          </a:p>
+        </p:txBody>
       </p:sp>
       <p:sp>
         <p:nvSpPr>
@@ -1527,6 +1583,13 @@
             <a:srgbClr val="0D0D0D"/>
           </a:solidFill>
         </p:spPr>
+        <p:txBody>
+          <a:bodyPr/>
+          <a:lstStyle/>
+          <a:p>
+            <a:endParaRPr lang="zh-CN" altLang="en-US"/>
+          </a:p>
+        </p:txBody>
       </p:sp>
       <p:sp>
         <p:nvSpPr>
@@ -1546,6 +1609,13 @@
             <a:srgbClr val="0D0D0D"/>
           </a:solidFill>
         </p:spPr>
+        <p:txBody>
+          <a:bodyPr/>
+          <a:lstStyle/>
+          <a:p>
+            <a:endParaRPr lang="zh-CN" altLang="en-US"/>
+          </a:p>
+        </p:txBody>
       </p:sp>
       <p:sp>
         <p:nvSpPr>
@@ -1592,6 +1662,13 @@
             <a:srgbClr val="93FF73"/>
           </a:solidFill>
         </p:spPr>
+        <p:txBody>
+          <a:bodyPr/>
+          <a:lstStyle/>
+          <a:p>
+            <a:endParaRPr lang="zh-CN" altLang="en-US"/>
+          </a:p>
+        </p:txBody>
       </p:sp>
       <p:sp>
         <p:nvSpPr>
@@ -1614,6 +1691,13 @@
             <a:srgbClr val="36D579"/>
           </a:solidFill>
         </p:spPr>
+        <p:txBody>
+          <a:bodyPr/>
+          <a:lstStyle/>
+          <a:p>
+            <a:endParaRPr lang="zh-CN" altLang="en-US"/>
+          </a:p>
+        </p:txBody>
       </p:sp>
       <p:sp>
         <p:nvSpPr>
@@ -1636,6 +1720,13 @@
             <a:srgbClr val="36D579"/>
           </a:solidFill>
         </p:spPr>
+        <p:txBody>
+          <a:bodyPr/>
+          <a:lstStyle/>
+          <a:p>
+            <a:endParaRPr lang="zh-CN" altLang="en-US"/>
+          </a:p>
+        </p:txBody>
       </p:sp>
       <p:sp>
         <p:nvSpPr>
@@ -1658,6 +1749,13 @@
             <a:srgbClr val="36D579"/>
           </a:solidFill>
         </p:spPr>
+        <p:txBody>
+          <a:bodyPr/>
+          <a:lstStyle/>
+          <a:p>
+            <a:endParaRPr lang="zh-CN" altLang="en-US"/>
+          </a:p>
+        </p:txBody>
       </p:sp>
       <p:sp>
         <p:nvSpPr>
@@ -1680,6 +1778,13 @@
             <a:srgbClr val="36D579"/>
           </a:solidFill>
         </p:spPr>
+        <p:txBody>
+          <a:bodyPr/>
+          <a:lstStyle/>
+          <a:p>
+            <a:endParaRPr lang="zh-CN" altLang="en-US"/>
+          </a:p>
+        </p:txBody>
       </p:sp>
       <p:sp>
         <p:nvSpPr>
@@ -1699,6 +1804,13 @@
             <a:srgbClr val="0D0D0D"/>
           </a:solidFill>
         </p:spPr>
+        <p:txBody>
+          <a:bodyPr/>
+          <a:lstStyle/>
+          <a:p>
+            <a:endParaRPr lang="zh-CN" altLang="en-US"/>
+          </a:p>
+        </p:txBody>
       </p:sp>
       <p:pic>
         <p:nvPicPr>
@@ -1840,7 +1952,7 @@
         </p:nvSpPr>
         <p:spPr>
           <a:xfrm>
-            <a:off x="0" y="0"/>
+            <a:off x="-18976" y="318"/>
             <a:ext cx="12192000" cy="6858000"/>
           </a:xfrm>
           <a:prstGeom prst="rect">
@@ -1850,6 +1962,13 @@
             <a:srgbClr val="F2F2F2"/>
           </a:solidFill>
         </p:spPr>
+        <p:txBody>
+          <a:bodyPr/>
+          <a:lstStyle/>
+          <a:p>
+            <a:endParaRPr lang="zh-CN" altLang="en-US"/>
+          </a:p>
+        </p:txBody>
       </p:sp>
       <p:sp>
         <p:nvSpPr>
@@ -1875,6 +1994,13 @@
             <a:prstDash val="solid"/>
           </a:ln>
         </p:spPr>
+        <p:txBody>
+          <a:bodyPr/>
+          <a:lstStyle/>
+          <a:p>
+            <a:endParaRPr lang="zh-CN" altLang="en-US"/>
+          </a:p>
+        </p:txBody>
       </p:sp>
       <p:sp>
         <p:nvSpPr>
@@ -1884,8 +2010,8 @@
         </p:nvSpPr>
         <p:spPr>
           <a:xfrm>
-            <a:off x="18976" y="-1807"/>
-            <a:ext cx="3045460" cy="6858000"/>
+            <a:off x="18976" y="2772621"/>
+            <a:ext cx="3045460" cy="4085697"/>
           </a:xfrm>
           <a:prstGeom prst="rect">
             <a:avLst/>
@@ -1894,6 +2020,13 @@
             <a:srgbClr val="36D579"/>
           </a:solidFill>
         </p:spPr>
+        <p:txBody>
+          <a:bodyPr/>
+          <a:lstStyle/>
+          <a:p>
+            <a:endParaRPr lang="zh-CN" altLang="en-US"/>
+          </a:p>
+        </p:txBody>
       </p:sp>
       <p:sp>
         <p:nvSpPr>
@@ -1903,7 +2036,7 @@
         </p:nvSpPr>
         <p:spPr>
           <a:xfrm>
-            <a:off x="336550" y="272415"/>
+            <a:off x="336550" y="297791"/>
             <a:ext cx="2593975" cy="1754326"/>
           </a:xfrm>
           <a:prstGeom prst="rect">
@@ -1963,6 +2096,13 @@
             <a:prstDash val="solid"/>
           </a:ln>
         </p:spPr>
+        <p:txBody>
+          <a:bodyPr/>
+          <a:lstStyle/>
+          <a:p>
+            <a:endParaRPr lang="zh-CN" altLang="en-US"/>
+          </a:p>
+        </p:txBody>
       </p:sp>
       <p:sp>
         <p:nvSpPr>
@@ -1990,6 +2130,13 @@
             <a:prstDash val="solid"/>
           </a:ln>
         </p:spPr>
+        <p:txBody>
+          <a:bodyPr/>
+          <a:lstStyle/>
+          <a:p>
+            <a:endParaRPr lang="zh-CN" altLang="en-US"/>
+          </a:p>
+        </p:txBody>
       </p:sp>
       <p:sp>
         <p:nvSpPr>
@@ -2017,6 +2164,13 @@
             <a:prstDash val="solid"/>
           </a:ln>
         </p:spPr>
+        <p:txBody>
+          <a:bodyPr/>
+          <a:lstStyle/>
+          <a:p>
+            <a:endParaRPr lang="zh-CN" altLang="en-US"/>
+          </a:p>
+        </p:txBody>
       </p:sp>
       <p:sp>
         <p:nvSpPr>
@@ -2044,6 +2198,13 @@
             <a:prstDash val="solid"/>
           </a:ln>
         </p:spPr>
+        <p:txBody>
+          <a:bodyPr/>
+          <a:lstStyle/>
+          <a:p>
+            <a:endParaRPr lang="zh-CN" altLang="en-US"/>
+          </a:p>
+        </p:txBody>
       </p:sp>
       <p:pic>
         <p:nvPicPr>
@@ -2149,7 +2310,7 @@
         </p:nvSpPr>
         <p:spPr>
           <a:xfrm>
-            <a:off x="3517900" y="273050"/>
+            <a:off x="3517900" y="298426"/>
             <a:ext cx="4429125" cy="638175"/>
           </a:xfrm>
           <a:prstGeom prst="rect">
@@ -2189,7 +2350,7 @@
         </p:nvSpPr>
         <p:spPr>
           <a:xfrm>
-            <a:off x="3517900" y="911225"/>
+            <a:off x="3517900" y="936601"/>
             <a:ext cx="6231890" cy="891540"/>
           </a:xfrm>
           <a:prstGeom prst="rect">
@@ -2231,7 +2392,7 @@
         </p:nvSpPr>
         <p:spPr>
           <a:xfrm>
-            <a:off x="5467350" y="2628997"/>
+            <a:off x="5467350" y="2654373"/>
             <a:ext cx="4429125" cy="638175"/>
           </a:xfrm>
           <a:prstGeom prst="rect">
@@ -2441,6 +2602,13 @@
             <a:srgbClr val="F2F2F2"/>
           </a:solidFill>
         </p:spPr>
+        <p:txBody>
+          <a:bodyPr/>
+          <a:lstStyle/>
+          <a:p>
+            <a:endParaRPr lang="zh-CN" altLang="en-US"/>
+          </a:p>
+        </p:txBody>
       </p:sp>
       <p:sp>
         <p:nvSpPr>
@@ -2460,6 +2628,13 @@
             <a:srgbClr val="FCEC73"/>
           </a:solidFill>
         </p:spPr>
+        <p:txBody>
+          <a:bodyPr/>
+          <a:lstStyle/>
+          <a:p>
+            <a:endParaRPr lang="zh-CN" altLang="en-US"/>
+          </a:p>
+        </p:txBody>
       </p:sp>
       <p:sp>
         <p:nvSpPr>
@@ -2479,6 +2654,13 @@
             <a:srgbClr val="7030A0"/>
           </a:solidFill>
         </p:spPr>
+        <p:txBody>
+          <a:bodyPr/>
+          <a:lstStyle/>
+          <a:p>
+            <a:endParaRPr lang="zh-CN" altLang="en-US"/>
+          </a:p>
+        </p:txBody>
       </p:sp>
       <p:sp>
         <p:nvSpPr>
@@ -2498,6 +2680,13 @@
             <a:srgbClr val="7030A0"/>
           </a:solidFill>
         </p:spPr>
+        <p:txBody>
+          <a:bodyPr/>
+          <a:lstStyle/>
+          <a:p>
+            <a:endParaRPr lang="zh-CN" altLang="en-US"/>
+          </a:p>
+        </p:txBody>
       </p:sp>
       <p:sp>
         <p:nvSpPr>
@@ -2526,6 +2715,13 @@
             <a:prstDash val="solid"/>
           </a:ln>
         </p:spPr>
+        <p:txBody>
+          <a:bodyPr/>
+          <a:lstStyle/>
+          <a:p>
+            <a:endParaRPr lang="zh-CN" altLang="en-US"/>
+          </a:p>
+        </p:txBody>
       </p:sp>
       <p:sp>
         <p:nvSpPr>
@@ -2554,6 +2750,13 @@
             <a:prstDash val="solid"/>
           </a:ln>
         </p:spPr>
+        <p:txBody>
+          <a:bodyPr/>
+          <a:lstStyle/>
+          <a:p>
+            <a:endParaRPr lang="zh-CN" altLang="en-US"/>
+          </a:p>
+        </p:txBody>
       </p:sp>
       <p:sp>
         <p:nvSpPr>
@@ -2573,6 +2776,13 @@
             <a:srgbClr val="000000"/>
           </a:solidFill>
         </p:spPr>
+        <p:txBody>
+          <a:bodyPr/>
+          <a:lstStyle/>
+          <a:p>
+            <a:endParaRPr lang="zh-CN" altLang="en-US"/>
+          </a:p>
+        </p:txBody>
       </p:sp>
       <p:sp>
         <p:nvSpPr>
@@ -2634,6 +2844,13 @@
             <a:srgbClr val="FCEC73"/>
           </a:solidFill>
         </p:spPr>
+        <p:txBody>
+          <a:bodyPr/>
+          <a:lstStyle/>
+          <a:p>
+            <a:endParaRPr lang="zh-CN" altLang="en-US"/>
+          </a:p>
+        </p:txBody>
       </p:sp>
       <p:pic>
         <p:nvPicPr>
@@ -2725,6 +2942,13 @@
             <a:srgbClr val="FCEC73"/>
           </a:solidFill>
         </p:spPr>
+        <p:txBody>
+          <a:bodyPr/>
+          <a:lstStyle/>
+          <a:p>
+            <a:endParaRPr lang="zh-CN" altLang="en-US"/>
+          </a:p>
+        </p:txBody>
       </p:sp>
       <p:sp>
         <p:nvSpPr>
@@ -2955,6 +3179,13 @@
             <a:srgbClr val="F2F2F2"/>
           </a:solidFill>
         </p:spPr>
+        <p:txBody>
+          <a:bodyPr/>
+          <a:lstStyle/>
+          <a:p>
+            <a:endParaRPr lang="zh-CN" altLang="en-US"/>
+          </a:p>
+        </p:txBody>
       </p:sp>
       <p:sp>
         <p:nvSpPr>
@@ -2980,6 +3211,13 @@
             <a:prstDash val="solid"/>
           </a:ln>
         </p:spPr>
+        <p:txBody>
+          <a:bodyPr/>
+          <a:lstStyle/>
+          <a:p>
+            <a:endParaRPr lang="zh-CN" altLang="en-US"/>
+          </a:p>
+        </p:txBody>
       </p:sp>
       <p:sp>
         <p:nvSpPr>
@@ -2999,6 +3237,13 @@
             <a:srgbClr val="7030A0"/>
           </a:solidFill>
         </p:spPr>
+        <p:txBody>
+          <a:bodyPr/>
+          <a:lstStyle/>
+          <a:p>
+            <a:endParaRPr lang="zh-CN" altLang="en-US"/>
+          </a:p>
+        </p:txBody>
       </p:sp>
       <p:sp>
         <p:nvSpPr>
@@ -3024,6 +3269,13 @@
             <a:prstDash val="solid"/>
           </a:ln>
         </p:spPr>
+        <p:txBody>
+          <a:bodyPr/>
+          <a:lstStyle/>
+          <a:p>
+            <a:endParaRPr lang="zh-CN" altLang="en-US"/>
+          </a:p>
+        </p:txBody>
       </p:sp>
       <p:sp>
         <p:nvSpPr>
@@ -3049,6 +3301,13 @@
             <a:tailEnd type="none"/>
           </a:ln>
         </p:spPr>
+        <p:txBody>
+          <a:bodyPr/>
+          <a:lstStyle/>
+          <a:p>
+            <a:endParaRPr lang="zh-CN" altLang="en-US"/>
+          </a:p>
+        </p:txBody>
       </p:sp>
       <p:sp>
         <p:nvSpPr>
@@ -3074,6 +3333,13 @@
             <a:tailEnd type="none"/>
           </a:ln>
         </p:spPr>
+        <p:txBody>
+          <a:bodyPr/>
+          <a:lstStyle/>
+          <a:p>
+            <a:endParaRPr lang="zh-CN" altLang="en-US"/>
+          </a:p>
+        </p:txBody>
       </p:sp>
       <p:sp>
         <p:nvSpPr>
@@ -3099,6 +3365,13 @@
             <a:tailEnd type="none"/>
           </a:ln>
         </p:spPr>
+        <p:txBody>
+          <a:bodyPr/>
+          <a:lstStyle/>
+          <a:p>
+            <a:endParaRPr lang="zh-CN" altLang="en-US"/>
+          </a:p>
+        </p:txBody>
       </p:sp>
       <p:sp>
         <p:nvSpPr>
@@ -3118,6 +3391,13 @@
             <a:srgbClr val="C2DCFF"/>
           </a:solidFill>
         </p:spPr>
+        <p:txBody>
+          <a:bodyPr/>
+          <a:lstStyle/>
+          <a:p>
+            <a:endParaRPr lang="zh-CN" altLang="en-US"/>
+          </a:p>
+        </p:txBody>
       </p:sp>
       <p:sp>
         <p:nvSpPr>
@@ -3143,6 +3423,13 @@
             <a:tailEnd type="none"/>
           </a:ln>
         </p:spPr>
+        <p:txBody>
+          <a:bodyPr/>
+          <a:lstStyle/>
+          <a:p>
+            <a:endParaRPr lang="zh-CN" altLang="en-US"/>
+          </a:p>
+        </p:txBody>
       </p:sp>
       <p:sp>
         <p:nvSpPr>
@@ -3198,6 +3485,13 @@
             <a:prstDash val="solid"/>
           </a:ln>
         </p:spPr>
+        <p:txBody>
+          <a:bodyPr/>
+          <a:lstStyle/>
+          <a:p>
+            <a:endParaRPr lang="zh-CN" altLang="en-US"/>
+          </a:p>
+        </p:txBody>
       </p:sp>
       <p:sp>
         <p:nvSpPr>
@@ -3223,6 +3517,13 @@
             <a:prstDash val="solid"/>
           </a:ln>
         </p:spPr>
+        <p:txBody>
+          <a:bodyPr/>
+          <a:lstStyle/>
+          <a:p>
+            <a:endParaRPr lang="zh-CN" altLang="en-US"/>
+          </a:p>
+        </p:txBody>
       </p:sp>
       <p:sp>
         <p:nvSpPr>
@@ -3248,6 +3549,13 @@
             <a:prstDash val="solid"/>
           </a:ln>
         </p:spPr>
+        <p:txBody>
+          <a:bodyPr/>
+          <a:lstStyle/>
+          <a:p>
+            <a:endParaRPr lang="zh-CN" altLang="en-US"/>
+          </a:p>
+        </p:txBody>
       </p:sp>
       <p:pic>
         <p:nvPicPr>
@@ -3875,6 +4183,13 @@
             <a:srgbClr val="6AB2FF"/>
           </a:solidFill>
         </p:spPr>
+        <p:txBody>
+          <a:bodyPr/>
+          <a:lstStyle/>
+          <a:p>
+            <a:endParaRPr lang="zh-CN" altLang="en-US"/>
+          </a:p>
+        </p:txBody>
       </p:sp>
       <p:sp>
         <p:nvSpPr>
@@ -3894,6 +4209,13 @@
             <a:srgbClr val="C2DCFF"/>
           </a:solidFill>
         </p:spPr>
+        <p:txBody>
+          <a:bodyPr/>
+          <a:lstStyle/>
+          <a:p>
+            <a:endParaRPr lang="zh-CN" altLang="en-US"/>
+          </a:p>
+        </p:txBody>
       </p:sp>
       <p:sp>
         <p:nvSpPr>
@@ -3919,6 +4241,13 @@
             <a:prstDash val="solid"/>
           </a:ln>
         </p:spPr>
+        <p:txBody>
+          <a:bodyPr/>
+          <a:lstStyle/>
+          <a:p>
+            <a:endParaRPr lang="zh-CN" altLang="en-US"/>
+          </a:p>
+        </p:txBody>
       </p:sp>
       <p:sp>
         <p:nvSpPr>
@@ -3938,6 +4267,13 @@
             <a:srgbClr val="78644E"/>
           </a:solidFill>
         </p:spPr>
+        <p:txBody>
+          <a:bodyPr/>
+          <a:lstStyle/>
+          <a:p>
+            <a:endParaRPr lang="zh-CN" altLang="en-US"/>
+          </a:p>
+        </p:txBody>
       </p:sp>
       <p:sp>
         <p:nvSpPr>
@@ -3963,6 +4299,13 @@
             <a:prstDash val="solid"/>
           </a:ln>
         </p:spPr>
+        <p:txBody>
+          <a:bodyPr/>
+          <a:lstStyle/>
+          <a:p>
+            <a:endParaRPr lang="zh-CN" altLang="en-US"/>
+          </a:p>
+        </p:txBody>
       </p:sp>
       <p:sp>
         <p:nvSpPr>
@@ -3988,6 +4331,13 @@
             <a:prstDash val="solid"/>
           </a:ln>
         </p:spPr>
+        <p:txBody>
+          <a:bodyPr/>
+          <a:lstStyle/>
+          <a:p>
+            <a:endParaRPr lang="zh-CN" altLang="en-US"/>
+          </a:p>
+        </p:txBody>
       </p:sp>
       <p:sp>
         <p:nvSpPr>
@@ -4013,6 +4363,13 @@
             <a:prstDash val="solid"/>
           </a:ln>
         </p:spPr>
+        <p:txBody>
+          <a:bodyPr/>
+          <a:lstStyle/>
+          <a:p>
+            <a:endParaRPr lang="zh-CN" altLang="en-US"/>
+          </a:p>
+        </p:txBody>
       </p:sp>
       <p:sp>
         <p:nvSpPr>
@@ -4040,6 +4397,13 @@
             <a:prstDash val="solid"/>
           </a:ln>
         </p:spPr>
+        <p:txBody>
+          <a:bodyPr/>
+          <a:lstStyle/>
+          <a:p>
+            <a:endParaRPr lang="zh-CN" altLang="en-US"/>
+          </a:p>
+        </p:txBody>
       </p:sp>
       <p:pic>
         <p:nvPicPr>
@@ -4682,6 +5046,13 @@
             <a:prstDash val="solid"/>
           </a:ln>
         </p:spPr>
+        <p:txBody>
+          <a:bodyPr/>
+          <a:lstStyle/>
+          <a:p>
+            <a:endParaRPr lang="zh-CN" altLang="en-US"/>
+          </a:p>
+        </p:txBody>
       </p:sp>
       <p:pic>
         <p:nvPicPr>
@@ -4755,6 +5126,13 @@
             <a:prstDash val="solid"/>
           </a:ln>
         </p:spPr>
+        <p:txBody>
+          <a:bodyPr/>
+          <a:lstStyle/>
+          <a:p>
+            <a:endParaRPr lang="zh-CN" altLang="en-US"/>
+          </a:p>
+        </p:txBody>
       </p:sp>
       <p:sp>
         <p:nvSpPr>
@@ -4780,6 +5158,13 @@
             <a:prstDash val="solid"/>
           </a:ln>
         </p:spPr>
+        <p:txBody>
+          <a:bodyPr/>
+          <a:lstStyle/>
+          <a:p>
+            <a:endParaRPr lang="zh-CN" altLang="en-US"/>
+          </a:p>
+        </p:txBody>
       </p:sp>
       <p:sp>
         <p:nvSpPr>
@@ -4805,6 +5190,13 @@
             <a:prstDash val="solid"/>
           </a:ln>
         </p:spPr>
+        <p:txBody>
+          <a:bodyPr/>
+          <a:lstStyle/>
+          <a:p>
+            <a:endParaRPr lang="zh-CN" altLang="en-US"/>
+          </a:p>
+        </p:txBody>
       </p:sp>
       <p:sp>
         <p:nvSpPr>
@@ -4896,6 +5288,13 @@
             <a:srgbClr val="36D579"/>
           </a:solidFill>
         </p:spPr>
+        <p:txBody>
+          <a:bodyPr/>
+          <a:lstStyle/>
+          <a:p>
+            <a:endParaRPr lang="zh-CN" altLang="en-US"/>
+          </a:p>
+        </p:txBody>
       </p:sp>
       <p:sp>
         <p:nvSpPr>
@@ -4954,6 +5353,13 @@
             <a:srgbClr val="C2DCFF"/>
           </a:solidFill>
         </p:spPr>
+        <p:txBody>
+          <a:bodyPr/>
+          <a:lstStyle/>
+          <a:p>
+            <a:endParaRPr lang="zh-CN" altLang="en-US"/>
+          </a:p>
+        </p:txBody>
       </p:sp>
       <p:sp>
         <p:nvSpPr>
@@ -4982,6 +5388,13 @@
             <a:prstDash val="solid"/>
           </a:ln>
         </p:spPr>
+        <p:txBody>
+          <a:bodyPr/>
+          <a:lstStyle/>
+          <a:p>
+            <a:endParaRPr lang="zh-CN" altLang="en-US"/>
+          </a:p>
+        </p:txBody>
       </p:sp>
       <p:sp>
         <p:nvSpPr>
@@ -5010,6 +5423,13 @@
             <a:prstDash val="solid"/>
           </a:ln>
         </p:spPr>
+        <p:txBody>
+          <a:bodyPr/>
+          <a:lstStyle/>
+          <a:p>
+            <a:endParaRPr lang="zh-CN" altLang="en-US"/>
+          </a:p>
+        </p:txBody>
       </p:sp>
       <p:sp>
         <p:nvSpPr>
@@ -5038,6 +5458,13 @@
             <a:prstDash val="solid"/>
           </a:ln>
         </p:spPr>
+        <p:txBody>
+          <a:bodyPr/>
+          <a:lstStyle/>
+          <a:p>
+            <a:endParaRPr lang="zh-CN" altLang="en-US"/>
+          </a:p>
+        </p:txBody>
       </p:sp>
       <p:sp>
         <p:nvSpPr>
@@ -5099,6 +5526,13 @@
             <a:srgbClr val="FFFFFF"/>
           </a:solidFill>
         </p:spPr>
+        <p:txBody>
+          <a:bodyPr/>
+          <a:lstStyle/>
+          <a:p>
+            <a:endParaRPr lang="zh-CN" altLang="en-US"/>
+          </a:p>
+        </p:txBody>
       </p:sp>
       <p:sp>
         <p:nvSpPr>
@@ -5118,6 +5552,13 @@
             <a:srgbClr val="C2DCFF"/>
           </a:solidFill>
         </p:spPr>
+        <p:txBody>
+          <a:bodyPr/>
+          <a:lstStyle/>
+          <a:p>
+            <a:endParaRPr lang="zh-CN" altLang="en-US"/>
+          </a:p>
+        </p:txBody>
       </p:sp>
       <p:sp>
         <p:nvSpPr>
@@ -5137,6 +5578,13 @@
             <a:srgbClr val="C00000"/>
           </a:solidFill>
         </p:spPr>
+        <p:txBody>
+          <a:bodyPr/>
+          <a:lstStyle/>
+          <a:p>
+            <a:endParaRPr lang="zh-CN" altLang="en-US"/>
+          </a:p>
+        </p:txBody>
       </p:sp>
       <p:pic>
         <p:nvPicPr>
@@ -5208,6 +5656,13 @@
             <a:srgbClr val="78644E"/>
           </a:solidFill>
         </p:spPr>
+        <p:txBody>
+          <a:bodyPr/>
+          <a:lstStyle/>
+          <a:p>
+            <a:endParaRPr lang="zh-CN" altLang="en-US"/>
+          </a:p>
+        </p:txBody>
       </p:sp>
       <p:sp>
         <p:nvSpPr>
@@ -5464,6 +5919,13 @@
             <a:srgbClr val="F2F2F2"/>
           </a:solidFill>
         </p:spPr>
+        <p:txBody>
+          <a:bodyPr/>
+          <a:lstStyle/>
+          <a:p>
+            <a:endParaRPr lang="zh-CN" altLang="en-US"/>
+          </a:p>
+        </p:txBody>
       </p:sp>
       <p:sp>
         <p:nvSpPr>
@@ -5483,6 +5945,13 @@
             <a:srgbClr val="FCEC73"/>
           </a:solidFill>
         </p:spPr>
+        <p:txBody>
+          <a:bodyPr/>
+          <a:lstStyle/>
+          <a:p>
+            <a:endParaRPr lang="zh-CN" altLang="en-US"/>
+          </a:p>
+        </p:txBody>
       </p:sp>
       <p:sp>
         <p:nvSpPr>
@@ -5595,6 +6064,13 @@
             <a:prstDash val="solid"/>
           </a:ln>
         </p:spPr>
+        <p:txBody>
+          <a:bodyPr/>
+          <a:lstStyle/>
+          <a:p>
+            <a:endParaRPr lang="zh-CN" altLang="en-US"/>
+          </a:p>
+        </p:txBody>
       </p:sp>
       <p:sp>
         <p:nvSpPr>
@@ -5620,6 +6096,13 @@
             <a:prstDash val="solid"/>
           </a:ln>
         </p:spPr>
+        <p:txBody>
+          <a:bodyPr/>
+          <a:lstStyle/>
+          <a:p>
+            <a:endParaRPr lang="zh-CN" altLang="en-US"/>
+          </a:p>
+        </p:txBody>
       </p:sp>
       <p:sp>
         <p:nvSpPr>
@@ -5645,6 +6128,13 @@
             <a:prstDash val="solid"/>
           </a:ln>
         </p:spPr>
+        <p:txBody>
+          <a:bodyPr/>
+          <a:lstStyle/>
+          <a:p>
+            <a:endParaRPr lang="zh-CN" altLang="en-US"/>
+          </a:p>
+        </p:txBody>
       </p:sp>
       <p:sp>
         <p:nvSpPr>
@@ -5670,6 +6160,13 @@
             <a:prstDash val="solid"/>
           </a:ln>
         </p:spPr>
+        <p:txBody>
+          <a:bodyPr/>
+          <a:lstStyle/>
+          <a:p>
+            <a:endParaRPr lang="zh-CN" altLang="en-US"/>
+          </a:p>
+        </p:txBody>
       </p:sp>
       <p:sp>
         <p:nvSpPr>
@@ -5695,6 +6192,13 @@
             <a:prstDash val="solid"/>
           </a:ln>
         </p:spPr>
+        <p:txBody>
+          <a:bodyPr/>
+          <a:lstStyle/>
+          <a:p>
+            <a:endParaRPr lang="zh-CN" altLang="en-US"/>
+          </a:p>
+        </p:txBody>
       </p:sp>
       <p:pic>
         <p:nvPicPr>
@@ -5762,6 +6266,13 @@
             <a:srgbClr val="0D0D0D"/>
           </a:solidFill>
         </p:spPr>
+        <p:txBody>
+          <a:bodyPr/>
+          <a:lstStyle/>
+          <a:p>
+            <a:endParaRPr lang="zh-CN" altLang="en-US"/>
+          </a:p>
+        </p:txBody>
       </p:sp>
       <p:sp>
         <p:nvSpPr>
@@ -5781,6 +6292,13 @@
             <a:srgbClr val="0D0D0D"/>
           </a:solidFill>
         </p:spPr>
+        <p:txBody>
+          <a:bodyPr/>
+          <a:lstStyle/>
+          <a:p>
+            <a:endParaRPr lang="zh-CN" altLang="en-US"/>
+          </a:p>
+        </p:txBody>
       </p:sp>
       <p:sp>
         <p:nvSpPr>
@@ -5806,6 +6324,13 @@
             <a:prstDash val="solid"/>
           </a:ln>
         </p:spPr>
+        <p:txBody>
+          <a:bodyPr/>
+          <a:lstStyle/>
+          <a:p>
+            <a:endParaRPr lang="zh-CN" altLang="en-US"/>
+          </a:p>
+        </p:txBody>
       </p:sp>
       <p:sp>
         <p:nvSpPr>
@@ -5831,6 +6356,13 @@
             <a:prstDash val="solid"/>
           </a:ln>
         </p:spPr>
+        <p:txBody>
+          <a:bodyPr/>
+          <a:lstStyle/>
+          <a:p>
+            <a:endParaRPr lang="zh-CN" altLang="en-US"/>
+          </a:p>
+        </p:txBody>
       </p:sp>
       <p:sp>
         <p:nvSpPr>
@@ -5850,6 +6382,13 @@
             <a:srgbClr val="0D0D0D"/>
           </a:solidFill>
         </p:spPr>
+        <p:txBody>
+          <a:bodyPr/>
+          <a:lstStyle/>
+          <a:p>
+            <a:endParaRPr lang="zh-CN" altLang="en-US"/>
+          </a:p>
+        </p:txBody>
       </p:sp>
       <p:pic>
         <p:nvPicPr>
@@ -5901,6 +6440,13 @@
             <a:prstDash val="solid"/>
           </a:ln>
         </p:spPr>
+        <p:txBody>
+          <a:bodyPr/>
+          <a:lstStyle/>
+          <a:p>
+            <a:endParaRPr lang="zh-CN" altLang="en-US"/>
+          </a:p>
+        </p:txBody>
       </p:sp>
       <p:sp>
         <p:nvSpPr>
@@ -6392,6 +6938,13 @@
             <a:srgbClr val="99A4E9"/>
           </a:solidFill>
         </p:spPr>
+        <p:txBody>
+          <a:bodyPr/>
+          <a:lstStyle/>
+          <a:p>
+            <a:endParaRPr lang="zh-CN" altLang="en-US"/>
+          </a:p>
+        </p:txBody>
       </p:sp>
       <p:sp>
         <p:nvSpPr>
@@ -6414,6 +6967,13 @@
             <a:srgbClr val="36D579"/>
           </a:solidFill>
         </p:spPr>
+        <p:txBody>
+          <a:bodyPr/>
+          <a:lstStyle/>
+          <a:p>
+            <a:endParaRPr lang="zh-CN" altLang="en-US"/>
+          </a:p>
+        </p:txBody>
       </p:sp>
       <p:sp>
         <p:nvSpPr>
@@ -6494,6 +7054,13 @@
             <a:srgbClr val="FCEC73"/>
           </a:solidFill>
         </p:spPr>
+        <p:txBody>
+          <a:bodyPr/>
+          <a:lstStyle/>
+          <a:p>
+            <a:endParaRPr lang="zh-CN" altLang="en-US"/>
+          </a:p>
+        </p:txBody>
       </p:sp>
       <p:sp>
         <p:nvSpPr>
@@ -6513,6 +7080,13 @@
             <a:srgbClr val="7030A0"/>
           </a:solidFill>
         </p:spPr>
+        <p:txBody>
+          <a:bodyPr/>
+          <a:lstStyle/>
+          <a:p>
+            <a:endParaRPr lang="zh-CN" altLang="en-US"/>
+          </a:p>
+        </p:txBody>
       </p:sp>
       <p:sp>
         <p:nvSpPr>
@@ -6532,6 +7106,13 @@
             <a:srgbClr val="7030A0"/>
           </a:solidFill>
         </p:spPr>
+        <p:txBody>
+          <a:bodyPr/>
+          <a:lstStyle/>
+          <a:p>
+            <a:endParaRPr lang="zh-CN" altLang="en-US"/>
+          </a:p>
+        </p:txBody>
       </p:sp>
       <p:sp>
         <p:nvSpPr>
@@ -6551,6 +7132,13 @@
             <a:srgbClr val="7030A0"/>
           </a:solidFill>
         </p:spPr>
+        <p:txBody>
+          <a:bodyPr/>
+          <a:lstStyle/>
+          <a:p>
+            <a:endParaRPr lang="zh-CN" altLang="en-US"/>
+          </a:p>
+        </p:txBody>
       </p:sp>
       <p:sp>
         <p:nvSpPr>
@@ -6570,6 +7158,13 @@
             <a:srgbClr val="0D0D0D"/>
           </a:solidFill>
         </p:spPr>
+        <p:txBody>
+          <a:bodyPr/>
+          <a:lstStyle/>
+          <a:p>
+            <a:endParaRPr lang="zh-CN" altLang="en-US"/>
+          </a:p>
+        </p:txBody>
       </p:sp>
       <p:sp>
         <p:nvSpPr>
@@ -6589,6 +7184,13 @@
             <a:srgbClr val="0D0D0D"/>
           </a:solidFill>
         </p:spPr>
+        <p:txBody>
+          <a:bodyPr/>
+          <a:lstStyle/>
+          <a:p>
+            <a:endParaRPr lang="zh-CN" altLang="en-US"/>
+          </a:p>
+        </p:txBody>
       </p:sp>
       <p:sp>
         <p:nvSpPr>
@@ -6608,6 +7210,13 @@
             <a:srgbClr val="0D0D0D"/>
           </a:solidFill>
         </p:spPr>
+        <p:txBody>
+          <a:bodyPr/>
+          <a:lstStyle/>
+          <a:p>
+            <a:endParaRPr lang="zh-CN" altLang="en-US"/>
+          </a:p>
+        </p:txBody>
       </p:sp>
       <p:sp>
         <p:nvSpPr>
@@ -6627,6 +7236,13 @@
             <a:srgbClr val="0D0D0D"/>
           </a:solidFill>
         </p:spPr>
+        <p:txBody>
+          <a:bodyPr/>
+          <a:lstStyle/>
+          <a:p>
+            <a:endParaRPr lang="zh-CN" altLang="en-US"/>
+          </a:p>
+        </p:txBody>
       </p:sp>
       <p:sp>
         <p:nvSpPr>
@@ -6673,6 +7289,13 @@
             <a:srgbClr val="93FF73"/>
           </a:solidFill>
         </p:spPr>
+        <p:txBody>
+          <a:bodyPr/>
+          <a:lstStyle/>
+          <a:p>
+            <a:endParaRPr lang="zh-CN" altLang="en-US"/>
+          </a:p>
+        </p:txBody>
       </p:sp>
       <p:sp>
         <p:nvSpPr>
@@ -6695,6 +7318,13 @@
             <a:srgbClr val="36D579"/>
           </a:solidFill>
         </p:spPr>
+        <p:txBody>
+          <a:bodyPr/>
+          <a:lstStyle/>
+          <a:p>
+            <a:endParaRPr lang="zh-CN" altLang="en-US"/>
+          </a:p>
+        </p:txBody>
       </p:sp>
       <p:sp>
         <p:nvSpPr>
@@ -6717,6 +7347,13 @@
             <a:srgbClr val="36D579"/>
           </a:solidFill>
         </p:spPr>
+        <p:txBody>
+          <a:bodyPr/>
+          <a:lstStyle/>
+          <a:p>
+            <a:endParaRPr lang="zh-CN" altLang="en-US"/>
+          </a:p>
+        </p:txBody>
       </p:sp>
       <p:sp>
         <p:nvSpPr>
@@ -6739,6 +7376,13 @@
             <a:srgbClr val="36D579"/>
           </a:solidFill>
         </p:spPr>
+        <p:txBody>
+          <a:bodyPr/>
+          <a:lstStyle/>
+          <a:p>
+            <a:endParaRPr lang="zh-CN" altLang="en-US"/>
+          </a:p>
+        </p:txBody>
       </p:sp>
       <p:sp>
         <p:nvSpPr>
@@ -6761,6 +7405,13 @@
             <a:srgbClr val="36D579"/>
           </a:solidFill>
         </p:spPr>
+        <p:txBody>
+          <a:bodyPr/>
+          <a:lstStyle/>
+          <a:p>
+            <a:endParaRPr lang="zh-CN" altLang="en-US"/>
+          </a:p>
+        </p:txBody>
       </p:sp>
       <p:sp>
         <p:nvSpPr>
@@ -6780,6 +7431,13 @@
             <a:srgbClr val="0D0D0D"/>
           </a:solidFill>
         </p:spPr>
+        <p:txBody>
+          <a:bodyPr/>
+          <a:lstStyle/>
+          <a:p>
+            <a:endParaRPr lang="zh-CN" altLang="en-US"/>
+          </a:p>
+        </p:txBody>
       </p:sp>
       <p:pic>
         <p:nvPicPr>
@@ -6874,6 +7532,13 @@
             <a:srgbClr val="93FF73"/>
           </a:solidFill>
         </p:spPr>
+        <p:txBody>
+          <a:bodyPr/>
+          <a:lstStyle/>
+          <a:p>
+            <a:endParaRPr lang="zh-CN" altLang="en-US"/>
+          </a:p>
+        </p:txBody>
       </p:sp>
     </p:spTree>
   </p:cSld>
